--- a/Project/Project-1/Real-Time Analytics Dashboard.pptx
+++ b/Project/Project-1/Real-Time Analytics Dashboard.pptx
@@ -10865,8 +10865,8 @@
         </p:nvSpPr>
         <p:spPr>
           <a:xfrm rot="0">
-            <a:off x="10641335" y="7065764"/>
-            <a:ext cx="6617965" cy="2192536"/>
+            <a:off x="10641335" y="7494389"/>
+            <a:ext cx="6617965" cy="1335286"/>
           </a:xfrm>
           <a:prstGeom prst="rect">
             <a:avLst/>
@@ -10902,56 +10902,6 @@
                 <a:spcPts val="3445"/>
               </a:lnSpc>
             </a:pPr>
-            <a:r>
-              <a:rPr lang="en-US" sz="3445" spc="-68">
-                <a:solidFill>
-                  <a:srgbClr val="1C2120"/>
-                </a:solidFill>
-                <a:latin typeface="Poppins"/>
-                <a:ea typeface="Poppins"/>
-                <a:cs typeface="Poppins"/>
-                <a:sym typeface="Poppins"/>
-              </a:rPr>
-              <a:t>RAGAVI,</a:t>
-            </a:r>
-          </a:p>
-          <a:p>
-            <a:pPr algn="just">
-              <a:lnSpc>
-                <a:spcPts val="3445"/>
-              </a:lnSpc>
-            </a:pPr>
-            <a:r>
-              <a:rPr lang="en-US" sz="3445" spc="-68">
-                <a:solidFill>
-                  <a:srgbClr val="1C2120"/>
-                </a:solidFill>
-                <a:latin typeface="Poppins"/>
-                <a:ea typeface="Poppins"/>
-                <a:cs typeface="Poppins"/>
-                <a:sym typeface="Poppins"/>
-              </a:rPr>
-              <a:t>SIVAKAMI,</a:t>
-            </a:r>
-          </a:p>
-          <a:p>
-            <a:pPr algn="just">
-              <a:lnSpc>
-                <a:spcPts val="3445"/>
-              </a:lnSpc>
-            </a:pPr>
-            <a:r>
-              <a:rPr lang="en-US" sz="3445" spc="-68">
-                <a:solidFill>
-                  <a:srgbClr val="1C2120"/>
-                </a:solidFill>
-                <a:latin typeface="Poppins"/>
-                <a:ea typeface="Poppins"/>
-                <a:cs typeface="Poppins"/>
-                <a:sym typeface="Poppins"/>
-              </a:rPr>
-              <a:t>YOGESWAR,</a:t>
-            </a:r>
           </a:p>
           <a:p>
             <a:pPr algn="just">
